--- a/aula-01/apresentacao/Aula_01_Desenvolvimento_Mobile_v2.pptx
+++ b/aula-01/apresentacao/Aula_01_Desenvolvimento_Mobile_v2.pptx
@@ -522,10 +522,70 @@
           <a:lstStyle/>
           <a:p>
             <a:r>
-              <a:rPr lang="en-US" dirty="0"/>
-              <a:t>Abrir a aula com acolhimento. Dizer que hoje não é uma aula pesada de código: o foco é entender a disciplina, conhecer a turma e ter o primeiro contato prático com ambientes mobile.</a:t>
+              <a:rPr sz="1400" b="1"/>
+              <a:t>SLIDE 01 · Desenvolvimento Mobile</a:t>
             </a:r>
             <a:endParaRPr lang="en-US" dirty="0"/>
+          </a:p>
+          <a:p>
+            <a:r>
+              <a:rPr sz="1400" b="1"/>
+              <a:t>[2 min] · Abertura</a:t>
+            </a:r>
+          </a:p>
+          <a:p>
+            <a:r>
+              <a:rPr sz="1400"/>
+              <a:t/>
+            </a:r>
+          </a:p>
+          <a:p>
+            <a:r>
+              <a:rPr sz="1400" b="1"/>
+              <a:t>FALA SUGERIDA:</a:t>
+            </a:r>
+          </a:p>
+          <a:p>
+            <a:r>
+              <a:rPr sz="1400"/>
+              <a:t>Boa noite, pessoal. Eu sou o Emanuel Nascente e vou acompanhar vocês na disciplina de Desenvolvimento Mobile. Hoje eu não quero que vocês saiam daqui decorando código. Quero que saiam entendendo o que é desenvolvimento mobile e quais caminhos podemos usar para construir um aplicativo.</a:t>
+            </a:r>
+          </a:p>
+          <a:p>
+            <a:r>
+              <a:rPr sz="1400"/>
+              <a:t/>
+            </a:r>
+          </a:p>
+          <a:p>
+            <a:r>
+              <a:rPr sz="1400" b="1"/>
+              <a:t>FOCO:</a:t>
+            </a:r>
+          </a:p>
+          <a:p>
+            <a:r>
+              <a:rPr sz="1400"/>
+              <a:t>Acolhimento · reduzir ansiedade · avisar que há prática sem cobrança de sintaxe.</a:t>
+            </a:r>
+          </a:p>
+          <a:p>
+            <a:r>
+              <a:rPr sz="1400"/>
+              <a:t/>
+            </a:r>
+          </a:p>
+          <a:p>
+            <a:r>
+              <a:rPr sz="1400" b="1"/>
+              <a:t>TRANSIÇÃO:</a:t>
+            </a:r>
+          </a:p>
+          <a:p>
+            <a:r>
+              <a:rPr sz="1400"/>
+              <a:t>“Antes de falar de tecnologia, quero mostrar como organizei nosso primeiro encontro.”</a:t>
+            </a:r>
           </a:p>
         </p:txBody>
       </p:sp>
@@ -610,10 +670,70 @@
           <a:lstStyle/>
           <a:p>
             <a:r>
-              <a:rPr lang="en-US" dirty="0"/>
-              <a:t>Explicar que a ementa usa o termo híbrido e cita React Native e Flutter. Neste momento, manter linguagem simples: uma solução permite compartilhar parte do desenvolvimento. Depois podemos explicar as diferenças técnicas entre híbrido, cross-platform e native bridge.</a:t>
+              <a:rPr sz="1400" b="1"/>
+              <a:t>SLIDE 11 · Aplicativo híbrido / multiplataforma</a:t>
             </a:r>
             <a:endParaRPr lang="en-US" dirty="0"/>
+          </a:p>
+          <a:p>
+            <a:r>
+              <a:rPr sz="1400" b="1"/>
+              <a:t>[8 min] · Conceito</a:t>
+            </a:r>
+          </a:p>
+          <a:p>
+            <a:r>
+              <a:rPr sz="1400"/>
+              <a:t/>
+            </a:r>
+          </a:p>
+          <a:p>
+            <a:r>
+              <a:rPr sz="1400" b="1"/>
+              <a:t>FALA SUGERIDA:</a:t>
+            </a:r>
+          </a:p>
+          <a:p>
+            <a:r>
+              <a:rPr sz="1400"/>
+              <a:t>Uma abordagem em que compartilhamos parte importante da base entre plataformas, em vez de manter um projeto totalmente separado para cada uma.</a:t>
+            </a:r>
+          </a:p>
+          <a:p>
+            <a:r>
+              <a:rPr sz="1400"/>
+              <a:t/>
+            </a:r>
+          </a:p>
+          <a:p>
+            <a:r>
+              <a:rPr sz="1400" b="1"/>
+              <a:t>MENSAGEM-CHAVE:</a:t>
+            </a:r>
+          </a:p>
+          <a:p>
+            <a:r>
+              <a:rPr sz="1400"/>
+              <a:t>“Compartilhar código não significa que tudo será 100% igual. Em projetos reais ainda existem adaptações por plataforma.”</a:t>
+            </a:r>
+          </a:p>
+          <a:p>
+            <a:r>
+              <a:rPr sz="1400"/>
+              <a:t/>
+            </a:r>
+          </a:p>
+          <a:p>
+            <a:r>
+              <a:rPr sz="1400" b="1"/>
+              <a:t>TRANSIÇÃO:</a:t>
+            </a:r>
+          </a:p>
+          <a:p>
+            <a:r>
+              <a:rPr sz="1400"/>
+              <a:t>“Então qual é melhor? Essa pergunta, do jeito que está, é a pergunta errada.”</a:t>
+            </a:r>
           </a:p>
         </p:txBody>
       </p:sp>
@@ -698,10 +818,70 @@
           <a:lstStyle/>
           <a:p>
             <a:r>
-              <a:rPr lang="en-US" dirty="0"/>
-              <a:t>Ler a tabela de forma rápida. O ponto central é decisão técnica orientada a contexto: equipe, prazo, orçamento, recursos do dispositivo e público-alvo.</a:t>
+              <a:rPr sz="1400" b="1"/>
+              <a:t>SLIDE 12 · Comparação simples</a:t>
             </a:r>
             <a:endParaRPr lang="en-US" dirty="0"/>
+          </a:p>
+          <a:p>
+            <a:r>
+              <a:rPr sz="1400" b="1"/>
+              <a:t>[7 min] · Conceito</a:t>
+            </a:r>
+          </a:p>
+          <a:p>
+            <a:r>
+              <a:rPr sz="1400"/>
+              <a:t/>
+            </a:r>
+          </a:p>
+          <a:p>
+            <a:r>
+              <a:rPr sz="1400" b="1"/>
+              <a:t>FALA SUGERIDA:</a:t>
+            </a:r>
+          </a:p>
+          <a:p>
+            <a:r>
+              <a:rPr sz="1400"/>
+              <a:t>Não quero que vocês terminem dizendo “nativo é melhor” ou “React Native é melhor”. Quero que perguntem: melhor para qual problema?</a:t>
+            </a:r>
+          </a:p>
+          <a:p>
+            <a:r>
+              <a:rPr sz="1400"/>
+              <a:t/>
+            </a:r>
+          </a:p>
+          <a:p>
+            <a:r>
+              <a:rPr sz="1400" b="1"/>
+              <a:t>CRITÉRIOS:</a:t>
+            </a:r>
+          </a:p>
+          <a:p>
+            <a:r>
+              <a:rPr sz="1400"/>
+              <a:t>1. Plataformas · 2. Equipe · 3. Prazo · 4. Integração · 5. Manutenção</a:t>
+            </a:r>
+          </a:p>
+          <a:p>
+            <a:r>
+              <a:rPr sz="1400"/>
+              <a:t/>
+            </a:r>
+          </a:p>
+          <a:p>
+            <a:r>
+              <a:rPr sz="1400" b="1"/>
+              <a:t>ATENÇÃO:</a:t>
+            </a:r>
+          </a:p>
+          <a:p>
+            <a:r>
+              <a:rPr sz="1400"/>
+              <a:t>Não ensine como regra absoluta. São tendências e trade-offs, não leis.</a:t>
+            </a:r>
           </a:p>
         </p:txBody>
       </p:sp>
@@ -786,10 +966,52 @@
           <a:lstStyle/>
           <a:p>
             <a:r>
-              <a:rPr lang="en-US" dirty="0"/>
-              <a:t>Pode ser feito rapidamente em duplas. Serve para consolidar a diferença antes do intervalo. O professor não precisa corrigir como certo/errado; deve explorar argumentos.</a:t>
+              <a:rPr sz="1400" b="1"/>
+              <a:t>SLIDE 14 · Atividade relâmpago</a:t>
             </a:r>
             <a:endParaRPr lang="en-US" dirty="0"/>
+          </a:p>
+          <a:p>
+            <a:r>
+              <a:rPr sz="1400" b="1"/>
+              <a:t>[5–7 min] · Prática</a:t>
+            </a:r>
+          </a:p>
+          <a:p>
+            <a:r>
+              <a:rPr sz="1400"/>
+              <a:t/>
+            </a:r>
+          </a:p>
+          <a:p>
+            <a:r>
+              <a:rPr sz="1400" b="1"/>
+              <a:t>FALA SUGERIDA:</a:t>
+            </a:r>
+          </a:p>
+          <a:p>
+            <a:r>
+              <a:rPr sz="1400"/>
+              <a:t>Cenário A: delivery para Android e iPhone, equipe pequena, pouco tempo. Depois mude: câmera, sensores, Bluetooth passam a ser centrais. Mantêm a escolha?</a:t>
+            </a:r>
+          </a:p>
+          <a:p>
+            <a:r>
+              <a:rPr sz="1400"/>
+              <a:t/>
+            </a:r>
+          </a:p>
+          <a:p>
+            <a:r>
+              <a:rPr sz="1400" b="1"/>
+              <a:t>FOCO:</a:t>
+            </a:r>
+          </a:p>
+          <a:p>
+            <a:r>
+              <a:rPr sz="1400"/>
+              <a:t>Pergunte sempre: “qual requisito fez você escolher isso?”</a:t>
+            </a:r>
           </a:p>
         </p:txBody>
       </p:sp>
@@ -874,10 +1096,70 @@
           <a:lstStyle/>
           <a:p>
             <a:r>
-              <a:rPr lang="en-US" dirty="0"/>
-              <a:t>Intervalo. Na volta, abrir rapidamente os ambientes. Se houver atraso nas apresentações, este slide marca a transição para a parte prática.</a:t>
+              <a:rPr sz="1400" b="1"/>
+              <a:t>SLIDE 15 · Intervalo</a:t>
             </a:r>
             <a:endParaRPr lang="en-US" dirty="0"/>
+          </a:p>
+          <a:p>
+            <a:r>
+              <a:rPr sz="1400" b="1"/>
+              <a:t>[10–15 min] · Pausa</a:t>
+            </a:r>
+          </a:p>
+          <a:p>
+            <a:r>
+              <a:rPr sz="1400"/>
+              <a:t/>
+            </a:r>
+          </a:p>
+          <a:p>
+            <a:r>
+              <a:rPr sz="1400" b="1"/>
+              <a:t>SE FOR PLANO A:</a:t>
+            </a:r>
+          </a:p>
+          <a:p>
+            <a:r>
+              <a:rPr sz="1400"/>
+              <a:t>“Na volta vamos direto para os computadores. Primeiro uma verificação rápida do ambiente.”</a:t>
+            </a:r>
+          </a:p>
+          <a:p>
+            <a:r>
+              <a:rPr sz="1400"/>
+              <a:t/>
+            </a:r>
+          </a:p>
+          <a:p>
+            <a:r>
+              <a:rPr sz="1400" b="1"/>
+              <a:t>SE FOR PLANO B:</a:t>
+            </a:r>
+          </a:p>
+          <a:p>
+            <a:r>
+              <a:rPr sz="1400"/>
+              <a:t>“Na volta vocês vão trabalhar em equipes, cada uma com um cenário de projeto.”</a:t>
+            </a:r>
+          </a:p>
+          <a:p>
+            <a:r>
+              <a:rPr sz="1400"/>
+              <a:t/>
+            </a:r>
+          </a:p>
+          <a:p>
+            <a:r>
+              <a:rPr sz="1400" b="1"/>
+              <a:t>ATENÇÃO:</a:t>
+            </a:r>
+          </a:p>
+          <a:p>
+            <a:r>
+              <a:rPr sz="1400"/>
+              <a:t>Ponto de decisão. Faça o health check em no máximo 5 minutos.</a:t>
+            </a:r>
           </a:p>
         </p:txBody>
       </p:sp>
@@ -962,10 +1244,52 @@
           <a:lstStyle/>
           <a:p>
             <a:r>
-              <a:rPr lang="en-US" dirty="0"/>
-              <a:t>Reforçar que o objetivo é contato inicial e comparação. Se algum computador apresentar problema, formar duplas ou usar demonstração projetada.</a:t>
+              <a:rPr sz="1400" b="1"/>
+              <a:t>SLIDE 16 · Laboratório 01</a:t>
             </a:r>
             <a:endParaRPr lang="en-US" dirty="0"/>
+          </a:p>
+          <a:p>
+            <a:r>
+              <a:rPr sz="1400" b="1"/>
+              <a:t>[5 min] · Plano A</a:t>
+            </a:r>
+          </a:p>
+          <a:p>
+            <a:r>
+              <a:rPr sz="1400"/>
+              <a:t/>
+            </a:r>
+          </a:p>
+          <a:p>
+            <a:r>
+              <a:rPr sz="1400" b="1"/>
+              <a:t>FALA SUGERIDA:</a:t>
+            </a:r>
+          </a:p>
+          <a:p>
+            <a:r>
+              <a:rPr sz="1400"/>
+              <a:t>Vamos criar dois projetos que mostram praticamente a mesma coisa na tela. A diferença está no caminho que usamos para chegar lá.</a:t>
+            </a:r>
+          </a:p>
+          <a:p>
+            <a:r>
+              <a:rPr sz="1400"/>
+              <a:t/>
+            </a:r>
+          </a:p>
+          <a:p>
+            <a:r>
+              <a:rPr sz="1400" b="1"/>
+              <a:t>FOCO:</a:t>
+            </a:r>
+          </a:p>
+          <a:p>
+            <a:r>
+              <a:rPr sz="1400"/>
+              <a:t>Não tentem entender cada arquivo. Observem ferramenta, linguagem, estrutura e forma de execução.</a:t>
+            </a:r>
           </a:p>
         </p:txBody>
       </p:sp>
@@ -1050,10 +1374,70 @@
           <a:lstStyle/>
           <a:p>
             <a:r>
-              <a:rPr lang="en-US" dirty="0"/>
-              <a:t>Este slide é também um aviso para preparação do laboratório. Se algo não estiver instalado, priorizar demonstração coletiva e deixar a instalação detalhada para um material de apoio.</a:t>
+              <a:rPr sz="1400" b="1"/>
+              <a:t>SLIDE 17 · Antes de começar: checklist</a:t>
             </a:r>
             <a:endParaRPr lang="en-US" dirty="0"/>
+          </a:p>
+          <a:p>
+            <a:r>
+              <a:rPr sz="1400" b="1"/>
+              <a:t>[5 min] · Plano A</a:t>
+            </a:r>
+          </a:p>
+          <a:p>
+            <a:r>
+              <a:rPr sz="1400"/>
+              <a:t/>
+            </a:r>
+          </a:p>
+          <a:p>
+            <a:r>
+              <a:rPr sz="1400" b="1"/>
+              <a:t>FALA SUGERIDA:</a:t>
+            </a:r>
+          </a:p>
+          <a:p>
+            <a:r>
+              <a:rPr sz="1400"/>
+              <a:t>Android Studio abre? Existe SDK? Temos emulador ou celular? node -v funciona? Temos internet?</a:t>
+            </a:r>
+          </a:p>
+          <a:p>
+            <a:r>
+              <a:rPr sz="1400"/>
+              <a:t/>
+            </a:r>
+          </a:p>
+          <a:p>
+            <a:r>
+              <a:rPr sz="1400" b="1"/>
+              <a:t>ATENÇÃO:</a:t>
+            </a:r>
+          </a:p>
+          <a:p>
+            <a:r>
+              <a:rPr sz="1400"/>
+              <a:t>Acrescente uma verificação que não está no slide: se ~/.gradle/caches estiver vazio, a primeira build leva ~15 minutos por máquina. Vazio na maioria → vá para o Plano B.</a:t>
+            </a:r>
+          </a:p>
+          <a:p>
+            <a:r>
+              <a:rPr sz="1400"/>
+              <a:t/>
+            </a:r>
+          </a:p>
+          <a:p>
+            <a:r>
+              <a:rPr sz="1400" b="1"/>
+              <a:t>EVITAR:</a:t>
+            </a:r>
+          </a:p>
+          <a:p>
+            <a:r>
+              <a:rPr sz="1400"/>
+              <a:t>Não comece a instalar Android Studio ou SDK durante a aula.</a:t>
+            </a:r>
           </a:p>
         </p:txBody>
       </p:sp>
@@ -1138,10 +1522,88 @@
           <a:lstStyle/>
           <a:p>
             <a:r>
-              <a:rPr lang="en-US" dirty="0"/>
-              <a:t>Não explicar toda a classe. Apenas mostrar que a aplicação nativa tem estrutura própria do Android e usa Kotlin. Se o template vier diferente, adaptar ao ambiente instalado.</a:t>
+              <a:rPr sz="1400" b="1"/>
+              <a:t>SLIDE 18 · Parte A — Criando um app nativo</a:t>
             </a:r>
             <a:endParaRPr lang="en-US" dirty="0"/>
+          </a:p>
+          <a:p>
+            <a:r>
+              <a:rPr sz="1400" b="1"/>
+              <a:t>[35 min] · Plano A</a:t>
+            </a:r>
+          </a:p>
+          <a:p>
+            <a:r>
+              <a:rPr sz="1400"/>
+              <a:t/>
+            </a:r>
+          </a:p>
+          <a:p>
+            <a:r>
+              <a:rPr sz="1400" b="1"/>
+              <a:t>FALA SUGERIDA:</a:t>
+            </a:r>
+          </a:p>
+          <a:p>
+            <a:r>
+              <a:rPr sz="1400"/>
+              <a:t>Neste momento quero que reconheçam duas coisas: isso é Kotlin, e a interface está sendo declarada com Jetpack Compose.</a:t>
+            </a:r>
+          </a:p>
+          <a:p>
+            <a:r>
+              <a:rPr sz="1400"/>
+              <a:t/>
+            </a:r>
+          </a:p>
+          <a:p>
+            <a:r>
+              <a:rPr sz="1400" b="1"/>
+              <a:t>ORDEM DE EXECUÇÃO:</a:t>
+            </a:r>
+          </a:p>
+          <a:p>
+            <a:r>
+              <a:rPr sz="1400"/>
+              <a:t>Execução: 1) emulador pronto · 2) celular autorizado · 3) Compose Preview, se estiver demorando.</a:t>
+            </a:r>
+          </a:p>
+          <a:p>
+            <a:r>
+              <a:rPr sz="1400"/>
+              <a:t/>
+            </a:r>
+          </a:p>
+          <a:p>
+            <a:r>
+              <a:rPr sz="1400" b="1"/>
+              <a:t>ATENÇÃO:</a:t>
+            </a:r>
+          </a:p>
+          <a:p>
+            <a:r>
+              <a:rPr sz="1400"/>
+              <a:t>Avise a turma que o slide é ilustrativo. A alteração real é trocar só o texto dentro da função Greeting gerada pelo template.</a:t>
+            </a:r>
+          </a:p>
+          <a:p>
+            <a:r>
+              <a:rPr sz="1400"/>
+              <a:t/>
+            </a:r>
+          </a:p>
+          <a:p>
+            <a:r>
+              <a:rPr sz="1400" b="1"/>
+              <a:t>CORREÇÃO APLICADA:</a:t>
+            </a:r>
+          </a:p>
+          <a:p>
+            <a:r>
+              <a:rPr sz="1400"/>
+              <a:t>O código deste slide foi corrigido. O trecho anterior mostrava a MainActivity inteira e não compilava — faltavam os imports do Compose.</a:t>
+            </a:r>
           </a:p>
         </p:txBody>
       </p:sp>
@@ -1226,10 +1688,88 @@
           <a:lstStyle/>
           <a:p>
             <a:r>
-              <a:rPr lang="en-US" dirty="0"/>
-              <a:t>O Expo é uma forma didática para a primeira aula, porque reduz a complexidade inicial. Explicar que Flutter também será mencionado na disciplina, mas não é necessário instalar tudo hoje.</a:t>
+              <a:rPr sz="1400" b="1"/>
+              <a:t>SLIDE 19 · Parte B — Criando um app híbrido</a:t>
             </a:r>
             <a:endParaRPr lang="en-US" dirty="0"/>
+          </a:p>
+          <a:p>
+            <a:r>
+              <a:rPr sz="1400" b="1"/>
+              <a:t>[30 min] · Plano A</a:t>
+            </a:r>
+          </a:p>
+          <a:p>
+            <a:r>
+              <a:rPr sz="1400"/>
+              <a:t/>
+            </a:r>
+          </a:p>
+          <a:p>
+            <a:r>
+              <a:rPr sz="1400" b="1"/>
+              <a:t>FALA SUGERIDA:</a:t>
+            </a:r>
+          </a:p>
+          <a:p>
+            <a:r>
+              <a:rPr sz="1400"/>
+              <a:t>Aqui aparece JavaScript, componentes como View e Text, e uma estrutura completamente diferente da que acabamos de ver no Android Studio.</a:t>
+            </a:r>
+          </a:p>
+          <a:p>
+            <a:r>
+              <a:rPr sz="1400"/>
+              <a:t/>
+            </a:r>
+          </a:p>
+          <a:p>
+            <a:r>
+              <a:rPr sz="1400" b="1"/>
+              <a:t>PERGUNTA PARA A TURMA:</a:t>
+            </a:r>
+          </a:p>
+          <a:p>
+            <a:r>
+              <a:rPr sz="1400"/>
+              <a:t>“Onde está o Android Studio neste fluxo?” — é a pergunta mais importante do slide.</a:t>
+            </a:r>
+          </a:p>
+          <a:p>
+            <a:r>
+              <a:rPr sz="1400"/>
+              <a:t/>
+            </a:r>
+          </a:p>
+          <a:p>
+            <a:r>
+              <a:rPr sz="1400" b="1"/>
+              <a:t>DICA:</a:t>
+            </a:r>
+          </a:p>
+          <a:p>
+            <a:r>
+              <a:rPr sz="1400"/>
+              <a:t>Sem emulador e sem celular: npx expo start --web resolve a Parte B inteira no navegador.</a:t>
+            </a:r>
+          </a:p>
+          <a:p>
+            <a:r>
+              <a:rPr sz="1400"/>
+              <a:t/>
+            </a:r>
+          </a:p>
+          <a:p>
+            <a:r>
+              <a:rPr sz="1400" b="1"/>
+              <a:t>CORREÇÃO APLICADA:</a:t>
+            </a:r>
+          </a:p>
+          <a:p>
+            <a:r>
+              <a:rPr sz="1400"/>
+              <a:t>O comando foi corrigido para incluir --template blank. Sem ele, o Expo gera projeto com expo-router e o App.js que aparece no slide não existe.</a:t>
+            </a:r>
           </a:p>
         </p:txBody>
       </p:sp>
@@ -1314,10 +1854,88 @@
           <a:lstStyle/>
           <a:p>
             <a:r>
-              <a:rPr lang="en-US" dirty="0"/>
-              <a:t>Este é o principal fechamento conceitual da prática. O aluno precisa sair entendendo que o “app final” pode parecer igual, mas a tecnologia, fluxo de desenvolvimento e manutenção são diferentes.</a:t>
+              <a:rPr sz="1400" b="1"/>
+              <a:t>SLIDE 20 · Comparando os dois projetos</a:t>
             </a:r>
             <a:endParaRPr lang="en-US" dirty="0"/>
+          </a:p>
+          <a:p>
+            <a:r>
+              <a:rPr sz="1400" b="1"/>
+              <a:t>[15 min] · Plano A</a:t>
+            </a:r>
+          </a:p>
+          <a:p>
+            <a:r>
+              <a:rPr sz="1400"/>
+              <a:t/>
+            </a:r>
+          </a:p>
+          <a:p>
+            <a:r>
+              <a:rPr sz="1400" b="1"/>
+              <a:t>FALA SUGERIDA:</a:t>
+            </a:r>
+          </a:p>
+          <a:p>
+            <a:r>
+              <a:rPr sz="1400"/>
+              <a:t>Para o usuário, as duas telas parecem iguais. Para nós, o caminho foi completamente diferente.</a:t>
+            </a:r>
+          </a:p>
+          <a:p>
+            <a:r>
+              <a:rPr sz="1400"/>
+              <a:t/>
+            </a:r>
+          </a:p>
+          <a:p>
+            <a:r>
+              <a:rPr sz="1400" b="1"/>
+              <a:t>PERGUNTA PARA A TURMA:</a:t>
+            </a:r>
+          </a:p>
+          <a:p>
+            <a:r>
+              <a:rPr sz="1400"/>
+              <a:t>“Se o resultado visual é parecido, onde está a diferença?”</a:t>
+            </a:r>
+          </a:p>
+          <a:p>
+            <a:r>
+              <a:rPr sz="1400"/>
+              <a:t/>
+            </a:r>
+          </a:p>
+          <a:p>
+            <a:r>
+              <a:rPr sz="1400" b="1"/>
+              <a:t>FOCO:</a:t>
+            </a:r>
+          </a:p>
+          <a:p>
+            <a:r>
+              <a:rPr sz="1400"/>
+              <a:t>A diferença de tempo eles acabaram de sentir esperando o Gradle. Nomear isso logo depois fixa mais que qualquer explicação teórica.</a:t>
+            </a:r>
+          </a:p>
+          <a:p>
+            <a:r>
+              <a:rPr sz="1400"/>
+              <a:t/>
+            </a:r>
+          </a:p>
+          <a:p>
+            <a:r>
+              <a:rPr sz="1400" b="1"/>
+              <a:t>NOVIDADE NESTA VERSÃO:</a:t>
+            </a:r>
+          </a:p>
+          <a:p>
+            <a:r>
+              <a:rPr sz="1400"/>
+              <a:t>Foi acrescentada a linha “tempo até a primeira tela”, que não existia.</a:t>
+            </a:r>
           </a:p>
         </p:txBody>
       </p:sp>
@@ -1402,10 +2020,70 @@
           <a:lstStyle/>
           <a:p>
             <a:r>
-              <a:rPr lang="en-US" dirty="0"/>
-              <a:t>Pode ser feito em papel, formulário ou discussão rápida. Guardar as respostas, pois ajudarão a ajustar a aula 2 e o ritmo da turma.</a:t>
+              <a:rPr sz="1400" b="1"/>
+              <a:t>SLIDE 21 · Fechamento da aula</a:t>
             </a:r>
             <a:endParaRPr lang="en-US" dirty="0"/>
+          </a:p>
+          <a:p>
+            <a:r>
+              <a:rPr sz="1400" b="1"/>
+              <a:t>[10 min] · Encerramento</a:t>
+            </a:r>
+          </a:p>
+          <a:p>
+            <a:r>
+              <a:rPr sz="1400"/>
+              <a:t/>
+            </a:r>
+          </a:p>
+          <a:p>
+            <a:r>
+              <a:rPr sz="1400" b="1"/>
+              <a:t>FALA SUGERIDA:</a:t>
+            </a:r>
+          </a:p>
+          <a:p>
+            <a:r>
+              <a:rPr sz="1400"/>
+              <a:t>Tentem explicar com as próprias palavras, sem definição de livro.</a:t>
+            </a:r>
+          </a:p>
+          <a:p>
+            <a:r>
+              <a:rPr sz="1400"/>
+              <a:t/>
+            </a:r>
+          </a:p>
+          <a:p>
+            <a:r>
+              <a:rPr sz="1400" b="1"/>
+              <a:t>DICA:</a:t>
+            </a:r>
+          </a:p>
+          <a:p>
+            <a:r>
+              <a:rPr sz="1400"/>
+              <a:t>Use a Folha de Fechamento impressa. Dita em voz alta, você ouve 3 alunos; impressa, você leva 25 diagnósticos para planejar a aula 02.</a:t>
+            </a:r>
+          </a:p>
+          <a:p>
+            <a:r>
+              <a:rPr sz="1400"/>
+              <a:t/>
+            </a:r>
+          </a:p>
+          <a:p>
+            <a:r>
+              <a:rPr sz="1400" b="1"/>
+              <a:t>ATENÇÃO:</a:t>
+            </a:r>
+          </a:p>
+          <a:p>
+            <a:r>
+              <a:rPr sz="1400"/>
+              <a:t>Se muitos ainda responderem “nativo é melhor porque é mais rápido”, retome a ideia de contexto antes de encerrar.</a:t>
+            </a:r>
           </a:p>
         </p:txBody>
       </p:sp>
@@ -1490,10 +2168,70 @@
           <a:lstStyle/>
           <a:p>
             <a:r>
-              <a:rPr lang="en-US" dirty="0"/>
-              <a:t>Usar este slide para pactuar tempo: metade inicial mais conversada; metade final no laboratório. Se a apresentação dos alunos for mais rápida, avançar para a introdução ainda na primeira metade.</a:t>
+              <a:rPr sz="1400" b="1"/>
+              <a:t>SLIDE 02 · Plano da primeira aula</a:t>
             </a:r>
             <a:endParaRPr lang="en-US" dirty="0"/>
+          </a:p>
+          <a:p>
+            <a:r>
+              <a:rPr sz="1400" b="1"/>
+              <a:t>[3 min] · Abertura</a:t>
+            </a:r>
+          </a:p>
+          <a:p>
+            <a:r>
+              <a:rPr sz="1400"/>
+              <a:t/>
+            </a:r>
+          </a:p>
+          <a:p>
+            <a:r>
+              <a:rPr sz="1400" b="1"/>
+              <a:t>FALA SUGERIDA:</a:t>
+            </a:r>
+          </a:p>
+          <a:p>
+            <a:r>
+              <a:rPr sz="1400"/>
+              <a:t>A aula está dividida em duas partes. Na primeira, nos apresentamos e vemos as diferenças entre Web e Mobile, depois Nativo e Híbrido. Depois do intervalo entramos na parte prática.</a:t>
+            </a:r>
+          </a:p>
+          <a:p>
+            <a:r>
+              <a:rPr sz="1400"/>
+              <a:t/>
+            </a:r>
+          </a:p>
+          <a:p>
+            <a:r>
+              <a:rPr sz="1400" b="1"/>
+              <a:t>META DO ENCONTRO:</a:t>
+            </a:r>
+          </a:p>
+          <a:p>
+            <a:r>
+              <a:rPr sz="1400"/>
+              <a:t>“No final da aula eu quero perguntar a qualquer um de vocês qual a diferença entre Web, Mobile nativo e híbrido — e vocês conseguirem explicar com suas palavras.”</a:t>
+            </a:r>
+          </a:p>
+          <a:p>
+            <a:r>
+              <a:rPr sz="1400"/>
+              <a:t/>
+            </a:r>
+          </a:p>
+          <a:p>
+            <a:r>
+              <a:rPr sz="1400" b="1"/>
+              <a:t>EVITAR:</a:t>
+            </a:r>
+          </a:p>
+          <a:p>
+            <a:r>
+              <a:rPr sz="1400"/>
+              <a:t>Não explicar cada tecnologia do semestre aqui. O slide é só um mapa.</a:t>
+            </a:r>
           </a:p>
         </p:txBody>
       </p:sp>
@@ -1578,10 +2316,70 @@
           <a:lstStyle/>
           <a:p>
             <a:r>
-              <a:rPr lang="en-US" dirty="0"/>
-              <a:t>Encerrar retomando a pergunta da aula: existem diferentes formas de entregar software no celular. Na próxima aula começamos a avançar na base técnica.</a:t>
+              <a:rPr sz="1400" b="1"/>
+              <a:t>SLIDE 22 · Obrigado + próxima aula</a:t>
             </a:r>
             <a:endParaRPr lang="en-US" dirty="0"/>
+          </a:p>
+          <a:p>
+            <a:r>
+              <a:rPr sz="1400" b="1"/>
+              <a:t>[5 min] · Encerramento</a:t>
+            </a:r>
+          </a:p>
+          <a:p>
+            <a:r>
+              <a:rPr sz="1400"/>
+              <a:t/>
+            </a:r>
+          </a:p>
+          <a:p>
+            <a:r>
+              <a:rPr sz="1400" b="1"/>
+              <a:t>FALA SUGERIDA:</a:t>
+            </a:r>
+          </a:p>
+          <a:p>
+            <a:r>
+              <a:rPr sz="1400"/>
+              <a:t>Hoje o objetivo era abrir o mapa da disciplina. Na próxima aula avançamos na base técnica do ecossistema Android.</a:t>
+            </a:r>
+          </a:p>
+          <a:p>
+            <a:r>
+              <a:rPr sz="1400"/>
+              <a:t/>
+            </a:r>
+          </a:p>
+          <a:p>
+            <a:r>
+              <a:rPr sz="1400" b="1"/>
+              <a:t>FOCO:</a:t>
+            </a:r>
+          </a:p>
+          <a:p>
+            <a:r>
+              <a:rPr sz="1400"/>
+              <a:t>Este é o slide que fica projetado enquanto a turma guarda as coisas. Agora ele trabalha nesse tempo.</a:t>
+            </a:r>
+          </a:p>
+          <a:p>
+            <a:r>
+              <a:rPr sz="1400"/>
+              <a:t/>
+            </a:r>
+          </a:p>
+          <a:p>
+            <a:r>
+              <a:rPr sz="1400" b="1"/>
+              <a:t>NOVIDADE NESTA VERSÃO:</a:t>
+            </a:r>
+          </a:p>
+          <a:p>
+            <a:r>
+              <a:rPr sz="1400"/>
+              <a:t>O slide era só “Obrigado!”. Agora carrega a prévia da aula 02 e uma pergunta para levar para casa.</a:t>
+            </a:r>
           </a:p>
         </p:txBody>
       </p:sp>
@@ -1614,6 +2412,322 @@
         <p14:creationId xmlns:p14="http://schemas.microsoft.com/office/powerpoint/2010/main" val="1024086991"/>
       </p:ext>
     </p:extLst>
+  </p:cSld>
+  <p:clrMapOvr>
+    <a:masterClrMapping/>
+  </p:clrMapOvr>
+</p:notes>
+</file>
+
+<file path=ppt/notesSlides/notesSlide21.xml><?xml version="1.0" encoding="utf-8"?>
+<p:notes xmlns:a="http://schemas.openxmlformats.org/drawingml/2006/main" xmlns:p="http://schemas.openxmlformats.org/presentationml/2006/main" xmlns:r="http://schemas.openxmlformats.org/officeDocument/2006/relationships">
+  <p:cSld>
+    <p:spTree>
+      <p:nvGrpSpPr>
+        <p:cNvPr id="1" name=""/>
+        <p:cNvGrpSpPr/>
+        <p:nvPr/>
+      </p:nvGrpSpPr>
+      <p:grpSpPr>
+        <a:xfrm>
+          <a:off x="0" y="0"/>
+          <a:ext cx="0" cy="0"/>
+          <a:chOff x="0" y="0"/>
+          <a:chExt cx="0" cy="0"/>
+        </a:xfrm>
+      </p:grpSpPr>
+      <p:sp>
+        <p:nvSpPr>
+          <p:cNvPr id="2" name="Slide Image Placeholder 1"/>
+          <p:cNvSpPr>
+            <a:spLocks noGrp="1"/>
+          </p:cNvSpPr>
+          <p:nvPr>
+            <p:ph type="sldImg" idx="2"/>
+          </p:nvPr>
+        </p:nvSpPr>
+        <p:spPr/>
+      </p:sp>
+      <p:sp>
+        <p:nvSpPr>
+          <p:cNvPr id="3" name="Notes Placeholder 2"/>
+          <p:cNvSpPr>
+            <a:spLocks noGrp="1"/>
+          </p:cNvSpPr>
+          <p:nvPr>
+            <p:ph type="body" idx="3" sz="quarter"/>
+          </p:nvPr>
+        </p:nvSpPr>
+        <p:spPr/>
+        <p:txBody>
+          <a:bodyPr/>
+          <a:lstStyle/>
+          <a:p>
+            <a:r>
+              <a:rPr sz="1400" b="1"/>
+              <a:t>SLIDE 08 · Como funciona uma aplicação Mobile?</a:t>
+            </a:r>
+          </a:p>
+          <a:p>
+            <a:r>
+              <a:rPr sz="1400" b="1"/>
+              <a:t>[8 min] · Conceito</a:t>
+            </a:r>
+          </a:p>
+          <a:p>
+            <a:r>
+              <a:rPr sz="1400"/>
+              <a:t/>
+            </a:r>
+          </a:p>
+          <a:p>
+            <a:r>
+              <a:rPr sz="1400" b="1"/>
+              <a:t>FALA SUGERIDA:</a:t>
+            </a:r>
+          </a:p>
+          <a:p>
+            <a:r>
+              <a:rPr sz="1400"/>
+              <a:t>No slide anterior vimos o caminho de uma aplicação Web. No Mobile, o usuário toca no ícone de um aplicativo que já está instalado no aparelho. Esse app pode ser nativo, como um Android feito com Kotlin, ou multiplataforma, com React Native ou Flutter.</a:t>
+            </a:r>
+          </a:p>
+          <a:p>
+            <a:r>
+              <a:rPr sz="1400"/>
+              <a:t/>
+            </a:r>
+          </a:p>
+          <a:p>
+            <a:r>
+              <a:rPr sz="1400" b="1"/>
+              <a:t>MENSAGEM-CHAVE:</a:t>
+            </a:r>
+          </a:p>
+          <a:p>
+            <a:r>
+              <a:rPr sz="1400"/>
+              <a:t>“Não precisamos abrir um navegador. O software está instalado no dispositivo e pode se integrar diretamente aos recursos do sistema operacional.”</a:t>
+            </a:r>
+          </a:p>
+          <a:p>
+            <a:r>
+              <a:rPr sz="1400"/>
+              <a:t/>
+            </a:r>
+          </a:p>
+          <a:p>
+            <a:r>
+              <a:rPr sz="1400" b="1"/>
+              <a:t>FOCO:</a:t>
+            </a:r>
+          </a:p>
+          <a:p>
+            <a:r>
+              <a:rPr sz="1400"/>
+              <a:t>E isso não significa que o app tenha todos os dados dentro dele. Assim como na Web, ele consome uma API e busca informação em um servidor. A diferença está no ambiente onde a aplicação é executada.</a:t>
+            </a:r>
+          </a:p>
+          <a:p>
+            <a:r>
+              <a:rPr sz="1400"/>
+              <a:t/>
+            </a:r>
+          </a:p>
+          <a:p>
+            <a:r>
+              <a:rPr sz="1400" b="1"/>
+              <a:t>TRANSIÇÃO:</a:t>
+            </a:r>
+          </a:p>
+          <a:p>
+            <a:r>
+              <a:rPr sz="1400"/>
+              <a:t>“E o que significa estar integrado ao sistema operacional? É o que vamos ver agora: câmera, GPS, notificações, biometria, Bluetooth.”</a:t>
+            </a:r>
+          </a:p>
+          <a:p>
+            <a:r>
+              <a:rPr sz="1400"/>
+              <a:t/>
+            </a:r>
+          </a:p>
+          <a:p>
+            <a:r>
+              <a:rPr sz="1400" b="1"/>
+              <a:t>NOVIDADE NESTA VERSÃO:</a:t>
+            </a:r>
+          </a:p>
+          <a:p>
+            <a:r>
+              <a:rPr sz="1400"/>
+              <a:t>Slide novo. É o espelho estrutural do slide 07: lá o caminho era Usuário → Navegador → Web App → Servidor; aqui é Usuário → App instalado → Sistema Operacional → API → Servidor.</a:t>
+            </a:r>
+          </a:p>
+        </p:txBody>
+      </p:sp>
+      <p:sp>
+        <p:nvSpPr>
+          <p:cNvPr id="4" name="Slide Number Placeholder 3"/>
+          <p:cNvSpPr>
+            <a:spLocks noGrp="1"/>
+          </p:cNvSpPr>
+          <p:nvPr>
+            <p:ph type="sldNum" idx="5" sz="quarter"/>
+          </p:nvPr>
+        </p:nvSpPr>
+        <p:spPr/>
+      </p:sp>
+    </p:spTree>
+  </p:cSld>
+  <p:clrMapOvr>
+    <a:masterClrMapping/>
+  </p:clrMapOvr>
+</p:notes>
+</file>
+
+<file path=ppt/notesSlides/notesSlide22.xml><?xml version="1.0" encoding="utf-8"?>
+<p:notes xmlns:a="http://schemas.openxmlformats.org/drawingml/2006/main" xmlns:p="http://schemas.openxmlformats.org/presentationml/2006/main" xmlns:r="http://schemas.openxmlformats.org/officeDocument/2006/relationships">
+  <p:cSld>
+    <p:spTree>
+      <p:nvGrpSpPr>
+        <p:cNvPr id="1" name=""/>
+        <p:cNvGrpSpPr/>
+        <p:nvPr/>
+      </p:nvGrpSpPr>
+      <p:grpSpPr>
+        <a:xfrm>
+          <a:off x="0" y="0"/>
+          <a:ext cx="0" cy="0"/>
+          <a:chOff x="0" y="0"/>
+          <a:chExt cx="0" cy="0"/>
+        </a:xfrm>
+      </p:grpSpPr>
+      <p:sp>
+        <p:nvSpPr>
+          <p:cNvPr id="2" name="Slide Image Placeholder 1"/>
+          <p:cNvSpPr>
+            <a:spLocks noGrp="1"/>
+          </p:cNvSpPr>
+          <p:nvPr>
+            <p:ph type="sldImg" idx="2"/>
+          </p:nvPr>
+        </p:nvSpPr>
+        <p:spPr/>
+      </p:sp>
+      <p:sp>
+        <p:nvSpPr>
+          <p:cNvPr id="3" name="Notes Placeholder 2"/>
+          <p:cNvSpPr>
+            <a:spLocks noGrp="1"/>
+          </p:cNvSpPr>
+          <p:nvPr>
+            <p:ph type="body" idx="3" sz="quarter"/>
+          </p:nvPr>
+        </p:nvSpPr>
+        <p:spPr/>
+        <p:txBody>
+          <a:bodyPr/>
+          <a:lstStyle/>
+          <a:p>
+            <a:r>
+              <a:rPr sz="1400" b="1"/>
+              <a:t>SLIDE 13 · Mitos que vamos desfazer</a:t>
+            </a:r>
+          </a:p>
+          <a:p>
+            <a:r>
+              <a:rPr sz="1400" b="1"/>
+              <a:t>[6 min] · Conceito</a:t>
+            </a:r>
+          </a:p>
+          <a:p>
+            <a:r>
+              <a:rPr sz="1400"/>
+              <a:t/>
+            </a:r>
+          </a:p>
+          <a:p>
+            <a:r>
+              <a:rPr sz="1400" b="1"/>
+              <a:t>FALA SUGERIDA:</a:t>
+            </a:r>
+          </a:p>
+          <a:p>
+            <a:r>
+              <a:rPr sz="1400"/>
+              <a:t>Percorra os seis mitos. Pergunte se alguém já ouviu alguma dessas frases — provavelmente vários já ouviram.</a:t>
+            </a:r>
+          </a:p>
+          <a:p>
+            <a:r>
+              <a:rPr sz="1400"/>
+              <a:t/>
+            </a:r>
+          </a:p>
+          <a:p>
+            <a:r>
+              <a:rPr sz="1400" b="1"/>
+              <a:t>MENSAGEM-CHAVE:</a:t>
+            </a:r>
+          </a:p>
+          <a:p>
+            <a:r>
+              <a:rPr sz="1400"/>
+              <a:t>“Nenhuma dessas frases é regra. Todas são trade-offs que dependem do contexto.”</a:t>
+            </a:r>
+          </a:p>
+          <a:p>
+            <a:r>
+              <a:rPr sz="1400"/>
+              <a:t/>
+            </a:r>
+          </a:p>
+          <a:p>
+            <a:r>
+              <a:rPr sz="1400" b="1"/>
+              <a:t>FOCO:</a:t>
+            </a:r>
+          </a:p>
+          <a:p>
+            <a:r>
+              <a:rPr sz="1400"/>
+              <a:t>É o slide mais fotografável da aula. O aluno leva essas seis frases para a entrevista de estágio.</a:t>
+            </a:r>
+          </a:p>
+          <a:p>
+            <a:r>
+              <a:rPr sz="1400"/>
+              <a:t/>
+            </a:r>
+          </a:p>
+          <a:p>
+            <a:r>
+              <a:rPr sz="1400" b="1"/>
+              <a:t>NOVIDADE NESTA VERSÃO:</a:t>
+            </a:r>
+          </a:p>
+          <a:p>
+            <a:r>
+              <a:rPr sz="1400"/>
+              <a:t>Slide novo. Traz para a turma a seção 8 do roteiro, que até então existia só para o professor.</a:t>
+            </a:r>
+          </a:p>
+        </p:txBody>
+      </p:sp>
+      <p:sp>
+        <p:nvSpPr>
+          <p:cNvPr id="4" name="Slide Number Placeholder 3"/>
+          <p:cNvSpPr>
+            <a:spLocks noGrp="1"/>
+          </p:cNvSpPr>
+          <p:nvPr>
+            <p:ph type="sldNum" idx="5" sz="quarter"/>
+          </p:nvPr>
+        </p:nvSpPr>
+        <p:spPr/>
+      </p:sp>
+    </p:spTree>
   </p:cSld>
   <p:clrMapOvr>
     <a:masterClrMapping/>
@@ -1666,10 +2780,70 @@
           <a:lstStyle/>
           <a:p>
             <a:r>
-              <a:rPr lang="en-US" dirty="0"/>
-              <a:t>Apresentação curta. Evitar se alongar. Mostrar disponibilidade para dúvidas e deixar claro que o foco será aprender fazendo, mas com base teórica suficiente para entender as escolhas técnicas.</a:t>
+              <a:rPr sz="1400" b="1"/>
+              <a:t>SLIDE 03 · Apresentação do professor</a:t>
             </a:r>
             <a:endParaRPr lang="en-US" dirty="0"/>
+          </a:p>
+          <a:p>
+            <a:r>
+              <a:rPr sz="1400" b="1"/>
+              <a:t>[6–8 min] · Abertura</a:t>
+            </a:r>
+          </a:p>
+          <a:p>
+            <a:r>
+              <a:rPr sz="1400"/>
+              <a:t/>
+            </a:r>
+          </a:p>
+          <a:p>
+            <a:r>
+              <a:rPr sz="1400" b="1"/>
+              <a:t>FALA SUGERIDA:</a:t>
+            </a:r>
+          </a:p>
+          <a:p>
+            <a:r>
+              <a:rPr sz="1400"/>
+              <a:t>Gosto de trabalhar a programação entendendo primeiro o problema que estamos resolvendo. Vocês vão perceber que eu não quero mostrar só qual código escrever, mas por que escolhemos determinada solução.</a:t>
+            </a:r>
+          </a:p>
+          <a:p>
+            <a:r>
+              <a:rPr sz="1400"/>
+              <a:t/>
+            </a:r>
+          </a:p>
+          <a:p>
+            <a:r>
+              <a:rPr sz="1400" b="1"/>
+              <a:t>FOCO:</a:t>
+            </a:r>
+          </a:p>
+          <a:p>
+            <a:r>
+              <a:rPr sz="1400"/>
+              <a:t>Fluxo das aulas: conceito → demonstração → prática. Errar faz parte.</a:t>
+            </a:r>
+          </a:p>
+          <a:p>
+            <a:r>
+              <a:rPr sz="1400"/>
+              <a:t/>
+            </a:r>
+          </a:p>
+          <a:p>
+            <a:r>
+              <a:rPr sz="1400" b="1"/>
+              <a:t>EVITAR:</a:t>
+            </a:r>
+          </a:p>
+          <a:p>
+            <a:r>
+              <a:rPr sz="1400"/>
+              <a:t>Transformar em currículo profissional longo.</a:t>
+            </a:r>
           </a:p>
         </p:txBody>
       </p:sp>
@@ -1754,10 +2928,70 @@
           <a:lstStyle/>
           <a:p>
             <a:r>
-              <a:rPr lang="en-US" dirty="0"/>
-              <a:t>Controlar o tempo com gentileza. A apresentação é importante, mas não pode consumir toda a aula. Anotar tecnologias citadas pela turma: Java, JavaScript, PHP, Python, banco, Git, web.</a:t>
+              <a:rPr sz="1400" b="1"/>
+              <a:t>SLIDE 04 · Apresentação dos alunos</a:t>
             </a:r>
             <a:endParaRPr lang="en-US" dirty="0"/>
+          </a:p>
+          <a:p>
+            <a:r>
+              <a:rPr sz="1400" b="1"/>
+              <a:t>[~30 min] · Diagnóstico</a:t>
+            </a:r>
+          </a:p>
+          <a:p>
+            <a:r>
+              <a:rPr sz="1400"/>
+              <a:t/>
+            </a:r>
+          </a:p>
+          <a:p>
+            <a:r>
+              <a:rPr sz="1400" b="1"/>
+              <a:t>FALA SUGERIDA:</a:t>
+            </a:r>
+          </a:p>
+          <a:p>
+            <a:r>
+              <a:rPr sz="1400"/>
+              <a:t>Vamos manter aproximadamente um minuto por pessoa. Não é entrevista e não existe resposta certa. Quero descobrir o que vocês já viram nos módulos anteriores.</a:t>
+            </a:r>
+          </a:p>
+          <a:p>
+            <a:r>
+              <a:rPr sz="1400"/>
+              <a:t/>
+            </a:r>
+          </a:p>
+          <a:p>
+            <a:r>
+              <a:rPr sz="1400" b="1"/>
+              <a:t>ANOTAR:</a:t>
+            </a:r>
+          </a:p>
+          <a:p>
+            <a:r>
+              <a:rPr sz="1400"/>
+              <a:t>Recorrências: Java · JavaScript · PHP · Python · HTML/CSS · banco de dados · OO · Git · APIs · quem já tentou criar apps.</a:t>
+            </a:r>
+          </a:p>
+          <a:p>
+            <a:r>
+              <a:rPr sz="1400"/>
+              <a:t/>
+            </a:r>
+          </a:p>
+          <a:p>
+            <a:r>
+              <a:rPr sz="1400" b="1"/>
+              <a:t>ATENÇÃO:</a:t>
+            </a:r>
+          </a:p>
+          <a:p>
+            <a:r>
+              <a:rPr sz="1400"/>
+              <a:t>O slide prevê 25 min. Conte com ~30 — alunos passam do minuto. Use o material “Mapa da Turma” para manter a turma ativa enquanto os colegas falam.</a:t>
+            </a:r>
           </a:p>
         </p:txBody>
       </p:sp>
@@ -1842,10 +3076,52 @@
           <a:lstStyle/>
           <a:p>
             <a:r>
-              <a:rPr lang="en-US" dirty="0"/>
-              <a:t>Não aprofundar cada item. Mostrar a jornada geral para reduzir ansiedade e criar mapa mental do semestre. Reforçar que a primeira aula começa pelo primeiro tópico da ementa.</a:t>
+              <a:rPr sz="1400" b="1"/>
+              <a:t>SLIDE 05 · O que vamos aprender no semestre</a:t>
             </a:r>
             <a:endParaRPr lang="en-US" dirty="0"/>
+          </a:p>
+          <a:p>
+            <a:r>
+              <a:rPr sz="1400" b="1"/>
+              <a:t>[6 min] · Panorama</a:t>
+            </a:r>
+          </a:p>
+          <a:p>
+            <a:r>
+              <a:rPr sz="1400"/>
+              <a:t/>
+            </a:r>
+          </a:p>
+          <a:p>
+            <a:r>
+              <a:rPr sz="1400" b="1"/>
+              <a:t>FALA SUGERIDA:</a:t>
+            </a:r>
+          </a:p>
+          <a:p>
+            <a:r>
+              <a:rPr sz="1400"/>
+              <a:t>Hoje começamos pelo primeiro bloco: entender o ecossistema mobile e as formas de construir uma aplicação. Mais adiante: Android nativo com Kotlin, o papel do Java, React Native e Flutter, UX, testes e publicação.</a:t>
+            </a:r>
+          </a:p>
+          <a:p>
+            <a:r>
+              <a:rPr sz="1400"/>
+              <a:t/>
+            </a:r>
+          </a:p>
+          <a:p>
+            <a:r>
+              <a:rPr sz="1400" b="1"/>
+              <a:t>FOCO:</a:t>
+            </a:r>
+          </a:p>
+          <a:p>
+            <a:r>
+              <a:rPr sz="1400"/>
+              <a:t>Mostrar continuidade sem aprofundar nenhum item.</a:t>
+            </a:r>
           </a:p>
         </p:txBody>
       </p:sp>
@@ -1930,10 +3206,70 @@
           <a:lstStyle/>
           <a:p>
             <a:r>
-              <a:rPr lang="en-US" dirty="0"/>
-              <a:t>Fazer a pergunta e ouvir respostas antes de conceituar. Não tratar como pegadinha: o objetivo é mostrar que existem diferentes formas de entregar software no celular.</a:t>
+              <a:rPr sz="1400" b="1"/>
+              <a:t>SLIDE 06 · Pergunta de partida</a:t>
             </a:r>
             <a:endParaRPr lang="en-US" dirty="0"/>
+          </a:p>
+          <a:p>
+            <a:r>
+              <a:rPr sz="1400" b="1"/>
+              <a:t>[7–8 min] · Conceito</a:t>
+            </a:r>
+          </a:p>
+          <a:p>
+            <a:r>
+              <a:rPr sz="1400"/>
+              <a:t/>
+            </a:r>
+          </a:p>
+          <a:p>
+            <a:r>
+              <a:rPr sz="1400" b="1"/>
+              <a:t>FALA SUGERIDA:</a:t>
+            </a:r>
+          </a:p>
+          <a:p>
+            <a:r>
+              <a:rPr sz="1400"/>
+              <a:t>Um site aberto no celular é um aplicativo mobile? — Pare e espere. Peça dois ou três argumentos antes de seguir.</a:t>
+            </a:r>
+          </a:p>
+          <a:p>
+            <a:r>
+              <a:rPr sz="1400"/>
+              <a:t/>
+            </a:r>
+          </a:p>
+          <a:p>
+            <a:r>
+              <a:rPr sz="1400" b="1"/>
+              <a:t>FOCO:</a:t>
+            </a:r>
+          </a:p>
+          <a:p>
+            <a:r>
+              <a:rPr sz="1400"/>
+              <a:t>A pergunta separa duas coisas: o dispositivo onde o usuário está e a forma como o software foi construído e entregue.</a:t>
+            </a:r>
+          </a:p>
+          <a:p>
+            <a:r>
+              <a:rPr sz="1400"/>
+              <a:t/>
+            </a:r>
+          </a:p>
+          <a:p>
+            <a:r>
+              <a:rPr sz="1400" b="1"/>
+              <a:t>ATENÇÃO:</a:t>
+            </a:r>
+          </a:p>
+          <a:p>
+            <a:r>
+              <a:rPr sz="1400"/>
+              <a:t>Não diga que aplicações web “não acessam recursos do aparelho”. Navegadores modernos acessam vários. O ponto certo é que apps instalados têm integração mais direta e controlada pelo sistema.</a:t>
+            </a:r>
           </a:p>
         </p:txBody>
       </p:sp>
@@ -2018,10 +3354,70 @@
           <a:lstStyle/>
           <a:p>
             <a:r>
-              <a:rPr lang="en-US" dirty="0"/>
-              <a:t>Este slide deve conectar com conhecimento prévio de web. Os alunos provavelmente já conhecem navegador, HTML/CSS/JS e servidor. Mostrar que mobile tem outra camada: instalação, sistema operacional e recursos do aparelho.</a:t>
+              <a:rPr sz="1400" b="1"/>
+              <a:t>SLIDE 07 · Aplicação Web × Aplicação Mobile</a:t>
             </a:r>
             <a:endParaRPr lang="en-US" dirty="0"/>
+          </a:p>
+          <a:p>
+            <a:r>
+              <a:rPr sz="1400" b="1"/>
+              <a:t>[10 min] · Conceito</a:t>
+            </a:r>
+          </a:p>
+          <a:p>
+            <a:r>
+              <a:rPr sz="1400"/>
+              <a:t/>
+            </a:r>
+          </a:p>
+          <a:p>
+            <a:r>
+              <a:rPr sz="1400" b="1"/>
+              <a:t>FALA SUGERIDA:</a:t>
+            </a:r>
+          </a:p>
+          <a:p>
+            <a:r>
+              <a:rPr sz="1400"/>
+              <a:t>Usuário → navegador → aplicação web → servidor/API. Quando falamos de app instalado, existe outra camada: ele executa dentro do Android ou iOS e segue as regras daquele sistema.</a:t>
+            </a:r>
+          </a:p>
+          <a:p>
+            <a:r>
+              <a:rPr sz="1400"/>
+              <a:t/>
+            </a:r>
+          </a:p>
+          <a:p>
+            <a:r>
+              <a:rPr sz="1400" b="1"/>
+              <a:t>PERGUNTA PARA A TURMA:</a:t>
+            </a:r>
+          </a:p>
+          <a:p>
+            <a:r>
+              <a:rPr sz="1400"/>
+              <a:t>“Pensem em um app bancário. O que muda quando eu tenho o aplicativo instalado em vez de entrar pelo navegador?” — biometria, notificações, câmera para QR Code.</a:t>
+            </a:r>
+          </a:p>
+          <a:p>
+            <a:r>
+              <a:rPr sz="1400"/>
+              <a:t/>
+            </a:r>
+          </a:p>
+          <a:p>
+            <a:r>
+              <a:rPr sz="1400" b="1"/>
+              <a:t>FOCO:</a:t>
+            </a:r>
+          </a:p>
+          <a:p>
+            <a:r>
+              <a:rPr sz="1400"/>
+              <a:t>Não é que Web seja inferior. São ambientes de execução e distribuição diferentes.</a:t>
+            </a:r>
           </a:p>
         </p:txBody>
       </p:sp>
@@ -2106,10 +3502,70 @@
           <a:lstStyle/>
           <a:p>
             <a:r>
-              <a:rPr lang="en-US" dirty="0"/>
-              <a:t>Exemplos simples. Perguntar quais desses recursos os aplicativos que eles usam acessam. Não entrar em permissões ainda; apenas introduzir a ideia.</a:t>
+              <a:rPr sz="1400" b="1"/>
+              <a:t>SLIDE 09 · Recursos que tornam o mobile diferente</a:t>
             </a:r>
             <a:endParaRPr lang="en-US" dirty="0"/>
+          </a:p>
+          <a:p>
+            <a:r>
+              <a:rPr sz="1400" b="1"/>
+              <a:t>[7 min] · Conceito</a:t>
+            </a:r>
+          </a:p>
+          <a:p>
+            <a:r>
+              <a:rPr sz="1400"/>
+              <a:t/>
+            </a:r>
+          </a:p>
+          <a:p>
+            <a:r>
+              <a:rPr sz="1400" b="1"/>
+              <a:t>FALA SUGERIDA:</a:t>
+            </a:r>
+          </a:p>
+          <a:p>
+            <a:r>
+              <a:rPr sz="1400"/>
+              <a:t>Quando desenvolvemos para mobile, olhamos o aparelho como parte da aplicação: câmera, GPS, biometria, Bluetooth, notificações, sensores.</a:t>
+            </a:r>
+          </a:p>
+          <a:p>
+            <a:r>
+              <a:rPr sz="1400"/>
+              <a:t/>
+            </a:r>
+          </a:p>
+          <a:p>
+            <a:r>
+              <a:rPr sz="1400" b="1"/>
+              <a:t>PERGUNTA PARA A TURMA:</a:t>
+            </a:r>
+          </a:p>
+          <a:p>
+            <a:r>
+              <a:rPr sz="1400"/>
+              <a:t>“Qual desses recursos vocês usaram hoje?” — WhatsApp, Uber, banco, fones.</a:t>
+            </a:r>
+          </a:p>
+          <a:p>
+            <a:r>
+              <a:rPr sz="1400"/>
+              <a:t/>
+            </a:r>
+          </a:p>
+          <a:p>
+            <a:r>
+              <a:rPr sz="1400" b="1"/>
+              <a:t>FOCO:</a:t>
+            </a:r>
+          </a:p>
+          <a:p>
+            <a:r>
+              <a:rPr sz="1400"/>
+              <a:t>Preparar a ideia: quanto mais o projeto depende de integração específica, mais isso influencia a escolha tecnológica.</a:t>
+            </a:r>
           </a:p>
         </p:txBody>
       </p:sp>
@@ -2194,10 +3650,70 @@
           <a:lstStyle/>
           <a:p>
             <a:r>
-              <a:rPr lang="en-US" dirty="0"/>
-              <a:t>Explicar que nativo não significa “melhor sempre”. Significa que o app é feito com ferramentas e linguagem próprias daquele ecossistema. Para a disciplina, o foco prático principal tende a ser Android.</a:t>
+              <a:rPr sz="1400" b="1"/>
+              <a:t>SLIDE 10 · Aplicativo nativo</a:t>
             </a:r>
             <a:endParaRPr lang="en-US" dirty="0"/>
+          </a:p>
+          <a:p>
+            <a:r>
+              <a:rPr sz="1400" b="1"/>
+              <a:t>[8 min] · Conceito</a:t>
+            </a:r>
+          </a:p>
+          <a:p>
+            <a:r>
+              <a:rPr sz="1400"/>
+              <a:t/>
+            </a:r>
+          </a:p>
+          <a:p>
+            <a:r>
+              <a:rPr sz="1400" b="1"/>
+              <a:t>FALA SUGERIDA:</a:t>
+            </a:r>
+          </a:p>
+          <a:p>
+            <a:r>
+              <a:rPr sz="1400"/>
+              <a:t>Nativo é construir com tecnologias diretamente ligadas à plataforma. No Android, Kotlin é a principal hoje, com Java ainda presente em muitos projetos. No iOS, Swift.</a:t>
+            </a:r>
+          </a:p>
+          <a:p>
+            <a:r>
+              <a:rPr sz="1400"/>
+              <a:t/>
+            </a:r>
+          </a:p>
+          <a:p>
+            <a:r>
+              <a:rPr sz="1400" b="1"/>
+              <a:t>MENSAGEM-CHAVE:</a:t>
+            </a:r>
+          </a:p>
+          <a:p>
+            <a:r>
+              <a:rPr sz="1400"/>
+              <a:t>“Nativo não significa automaticamente melhor. Significa que estou trabalhando diretamente com o ecossistema daquela plataforma.”</a:t>
+            </a:r>
+          </a:p>
+          <a:p>
+            <a:r>
+              <a:rPr sz="1400"/>
+              <a:t/>
+            </a:r>
+          </a:p>
+          <a:p>
+            <a:r>
+              <a:rPr sz="1400" b="1"/>
+              <a:t>DESIGN:</a:t>
+            </a:r>
+          </a:p>
+          <a:p>
+            <a:r>
+              <a:rPr sz="1400"/>
+              <a:t>Os ícones de Kotlin, Android e Apple estão nas telas dos aparelhos — ajudam o aluno a associar marca e plataforma.</a:t>
+            </a:r>
           </a:p>
         </p:txBody>
       </p:sp>
